--- a/2026-Q2/2-TheMoralMan/2026-04-19-Romans-MoralMan.pptx
+++ b/2026-Q2/2-TheMoralMan/2026-04-19-Romans-MoralMan.pptx
@@ -273,7 +273,7 @@
               <a:pPr>
                 <a:defRPr/>
               </a:pPr>
-              <a:t>4/16/26</a:t>
+              <a:t>4/19/26</a:t>
             </a:fld>
             <a:endParaRPr lang="en-US"/>
           </a:p>
@@ -770,7 +770,7 @@
             </a:r>
           </a:p>
           <a:p>
-            <a:endParaRPr lang="en-US" dirty="0"/>
+            <a:endParaRPr lang="en-US" sz="1400" dirty="0"/>
           </a:p>
           <a:p>
             <a:r>
@@ -1458,7 +1458,7 @@
           <a:lstStyle/>
           <a:p>
             <a:r>
-              <a:rPr lang="en-US" sz="1200" b="1" kern="1200" dirty="0">
+              <a:rPr lang="en-US" sz="1400" b="1" kern="1200" dirty="0">
                 <a:solidFill>
                   <a:schemeClr val="tx1"/>
                 </a:solidFill>
@@ -1469,7 +1469,7 @@
               </a:rPr>
               <a:t>REVIEW</a:t>
             </a:r>
-            <a:endParaRPr lang="en-US" sz="1200" kern="1200" dirty="0">
+            <a:endParaRPr lang="en-US" sz="1400" kern="1200" dirty="0">
               <a:solidFill>
                 <a:schemeClr val="tx1"/>
               </a:solidFill>
@@ -1481,7 +1481,7 @@
           </a:p>
           <a:p>
             <a:r>
-              <a:rPr lang="en-US" sz="1200" b="1" kern="1200" dirty="0">
+              <a:rPr lang="en-US" sz="1400" b="1" kern="1200" dirty="0">
                 <a:solidFill>
                   <a:schemeClr val="tx1"/>
                 </a:solidFill>
@@ -1492,7 +1492,7 @@
               </a:rPr>
               <a:t>The Pagan Man - They Became Fools…</a:t>
             </a:r>
-            <a:endParaRPr lang="en-US" sz="1200" kern="1200" dirty="0">
+            <a:endParaRPr lang="en-US" sz="1400" kern="1200" dirty="0">
               <a:solidFill>
                 <a:schemeClr val="tx1"/>
               </a:solidFill>
@@ -1504,7 +1504,7 @@
           </a:p>
           <a:p>
             <a:r>
-              <a:rPr lang="en-US" sz="1200" kern="1200" dirty="0">
+              <a:rPr lang="en-US" sz="1400" kern="1200" dirty="0">
                 <a:solidFill>
                   <a:schemeClr val="tx1"/>
                 </a:solidFill>
@@ -1519,7 +1519,7 @@
           <a:p>
             <a:pPr lvl="0"/>
             <a:r>
-              <a:rPr lang="en-US" sz="1200" kern="1200" dirty="0">
+              <a:rPr lang="en-US" sz="1400" kern="1200" dirty="0">
                 <a:solidFill>
                   <a:schemeClr val="tx1"/>
                 </a:solidFill>
@@ -1534,7 +1534,7 @@
           <a:p>
             <a:pPr lvl="0"/>
             <a:r>
-              <a:rPr lang="en-US" sz="1200" kern="1200" dirty="0">
+              <a:rPr lang="en-US" sz="1400" kern="1200" dirty="0">
                 <a:solidFill>
                   <a:schemeClr val="tx1"/>
                 </a:solidFill>
@@ -1549,7 +1549,7 @@
           <a:p>
             <a:pPr lvl="0"/>
             <a:r>
-              <a:rPr lang="en-US" sz="1200" kern="1200" dirty="0">
+              <a:rPr lang="en-US" sz="1400" kern="1200" dirty="0">
                 <a:solidFill>
                   <a:schemeClr val="tx1"/>
                 </a:solidFill>
@@ -1563,7 +1563,7 @@
           </a:p>
           <a:p>
             <a:r>
-              <a:rPr lang="en-US" sz="1200" kern="1200" dirty="0">
+              <a:rPr lang="en-US" sz="1400" kern="1200" dirty="0">
                 <a:solidFill>
                   <a:schemeClr val="tx1"/>
                 </a:solidFill>
@@ -1578,7 +1578,7 @@
           <a:p>
             <a:pPr lvl="0"/>
             <a:r>
-              <a:rPr lang="en-US" sz="1200" kern="1200" dirty="0">
+              <a:rPr lang="en-US" sz="1400" kern="1200" dirty="0">
                 <a:solidFill>
                   <a:schemeClr val="tx1"/>
                 </a:solidFill>
@@ -1593,7 +1593,7 @@
           <a:p>
             <a:pPr lvl="0"/>
             <a:r>
-              <a:rPr lang="en-US" sz="1200" b="1" kern="1200" dirty="0">
+              <a:rPr lang="en-US" sz="1400" b="1" kern="1200" dirty="0">
                 <a:solidFill>
                   <a:schemeClr val="tx1"/>
                 </a:solidFill>
@@ -1605,7 +1605,7 @@
               <a:t>But sinning against the Light that they do have</a:t>
             </a:r>
             <a:r>
-              <a:rPr lang="en-US" sz="1200" kern="1200" dirty="0">
+              <a:rPr lang="en-US" sz="1400" kern="1200" dirty="0">
                 <a:solidFill>
                   <a:schemeClr val="tx1"/>
                 </a:solidFill>
@@ -1617,7 +1617,7 @@
               <a:t>. </a:t>
             </a:r>
             <a:r>
-              <a:rPr lang="en-US" sz="1200" i="1" kern="1200" dirty="0">
+              <a:rPr lang="en-US" sz="1400" i="1" kern="1200" dirty="0">
                 <a:solidFill>
                   <a:schemeClr val="tx1"/>
                 </a:solidFill>
@@ -1628,7 +1628,7 @@
               </a:rPr>
               <a:t>  2 Corinthians 8:12</a:t>
             </a:r>
-            <a:endParaRPr lang="en-US" sz="1200" kern="1200" dirty="0">
+            <a:endParaRPr lang="en-US" sz="1400" kern="1200" dirty="0">
               <a:solidFill>
                 <a:schemeClr val="tx1"/>
               </a:solidFill>
@@ -1640,7 +1640,7 @@
           </a:p>
           <a:p>
             <a:r>
-              <a:rPr lang="en-US" sz="1200" i="1" kern="1200" dirty="0">
+              <a:rPr lang="en-US" sz="1400" i="1" kern="1200" dirty="0">
                 <a:solidFill>
                   <a:schemeClr val="tx1"/>
                 </a:solidFill>
@@ -1651,7 +1651,7 @@
               </a:rPr>
               <a:t>Case Study: Sodom</a:t>
             </a:r>
-            <a:endParaRPr lang="en-US" sz="1200" kern="1200" dirty="0">
+            <a:endParaRPr lang="en-US" sz="1400" kern="1200" dirty="0">
               <a:solidFill>
                 <a:schemeClr val="tx1"/>
               </a:solidFill>
@@ -1664,7 +1664,7 @@
           <a:p>
             <a:pPr lvl="0"/>
             <a:r>
-              <a:rPr lang="en-US" sz="1200" i="1" kern="1200" dirty="0">
+              <a:rPr lang="en-US" sz="1400" i="1" kern="1200" dirty="0">
                 <a:solidFill>
                   <a:schemeClr val="tx1"/>
                 </a:solidFill>
@@ -1675,7 +1675,7 @@
               </a:rPr>
               <a:t>Ezekiel 16:48-50</a:t>
             </a:r>
-            <a:endParaRPr lang="en-US" sz="1200" kern="1200" dirty="0">
+            <a:endParaRPr lang="en-US" sz="1400" kern="1200" dirty="0">
               <a:solidFill>
                 <a:schemeClr val="tx1"/>
               </a:solidFill>
@@ -1688,7 +1688,7 @@
           <a:p>
             <a:pPr lvl="0"/>
             <a:r>
-              <a:rPr lang="en-US" sz="1200" i="1" kern="1200" dirty="0">
+              <a:rPr lang="en-US" sz="1400" i="1" kern="1200" dirty="0">
                 <a:solidFill>
                   <a:schemeClr val="tx1"/>
                 </a:solidFill>
@@ -1699,7 +1699,7 @@
               </a:rPr>
               <a:t>For what cause did God “take them away”?</a:t>
             </a:r>
-            <a:endParaRPr lang="en-US" sz="1200" kern="1200" dirty="0">
+            <a:endParaRPr lang="en-US" sz="1400" kern="1200" dirty="0">
               <a:solidFill>
                 <a:schemeClr val="tx1"/>
               </a:solidFill>
@@ -1712,7 +1712,7 @@
           <a:p>
             <a:pPr lvl="0"/>
             <a:r>
-              <a:rPr lang="en-US" sz="1200" i="1" kern="1200" dirty="0">
+              <a:rPr lang="en-US" sz="1400" i="1" kern="1200" dirty="0">
                 <a:solidFill>
                   <a:schemeClr val="tx1"/>
                 </a:solidFill>
@@ -1723,7 +1723,7 @@
               </a:rPr>
               <a:t>Was this “fair” of God?</a:t>
             </a:r>
-            <a:endParaRPr lang="en-US" sz="1200" kern="1200" dirty="0">
+            <a:endParaRPr lang="en-US" sz="1400" kern="1200" dirty="0">
               <a:solidFill>
                 <a:schemeClr val="tx1"/>
               </a:solidFill>
@@ -1735,7 +1735,7 @@
           </a:p>
           <a:p>
             <a:r>
-              <a:rPr lang="en-US" sz="1200" kern="1200" dirty="0">
+              <a:rPr lang="en-US" sz="1400" kern="1200" dirty="0">
                 <a:solidFill>
                   <a:schemeClr val="tx1"/>
                 </a:solidFill>
@@ -1747,7 +1747,7 @@
               <a:t>The first step in the revelation of the righteousness that God provides for people by faith is to set forth our </a:t>
             </a:r>
             <a:r>
-              <a:rPr lang="en-US" sz="1200" b="1" kern="1200" dirty="0">
+              <a:rPr lang="en-US" sz="1400" b="1" kern="1200" dirty="0">
                 <a:solidFill>
                   <a:schemeClr val="tx1"/>
                 </a:solidFill>
@@ -1759,7 +1759,7 @@
               <a:t>need</a:t>
             </a:r>
             <a:r>
-              <a:rPr lang="en-US" sz="1200" kern="1200" dirty="0">
+              <a:rPr lang="en-US" sz="1400" kern="1200" dirty="0">
                 <a:solidFill>
                   <a:schemeClr val="tx1"/>
                 </a:solidFill>
@@ -1773,7 +1773,7 @@
           </a:p>
           <a:p>
             <a:r>
-              <a:rPr lang="en-US" sz="1200" b="1" kern="1200" dirty="0">
+              <a:rPr lang="en-US" sz="1400" b="1" kern="1200" dirty="0">
                 <a:solidFill>
                   <a:schemeClr val="tx1"/>
                 </a:solidFill>
@@ -1784,7 +1784,7 @@
               </a:rPr>
               <a:t>What Law is at play in this judgment scenario?    </a:t>
             </a:r>
-            <a:endParaRPr lang="en-US" sz="1200" kern="1200" dirty="0">
+            <a:endParaRPr lang="en-US" sz="1400" kern="1200" dirty="0">
               <a:solidFill>
                 <a:schemeClr val="tx1"/>
               </a:solidFill>
@@ -1797,7 +1797,7 @@
           <a:p>
             <a:pPr lvl="0"/>
             <a:r>
-              <a:rPr lang="en-US" sz="1200" kern="1200" dirty="0">
+              <a:rPr lang="en-US" sz="1400" kern="1200" dirty="0">
                 <a:solidFill>
                   <a:schemeClr val="tx1"/>
                 </a:solidFill>
@@ -1811,7 +1811,7 @@
           </a:p>
           <a:p>
             <a:r>
-              <a:rPr lang="en-US" sz="1200" b="1" kern="1200" dirty="0">
+              <a:rPr lang="en-US" sz="1400" b="1" kern="1200" dirty="0">
                 <a:solidFill>
                   <a:schemeClr val="tx1"/>
                 </a:solidFill>
@@ -1822,7 +1822,7 @@
               </a:rPr>
               <a:t>Is this a real law?   </a:t>
             </a:r>
-            <a:endParaRPr lang="en-US" sz="1200" kern="1200" dirty="0">
+            <a:endParaRPr lang="en-US" sz="1400" kern="1200" dirty="0">
               <a:solidFill>
                 <a:schemeClr val="tx1"/>
               </a:solidFill>
@@ -1835,7 +1835,7 @@
           <a:p>
             <a:pPr lvl="0"/>
             <a:r>
-              <a:rPr lang="en-US" sz="1200" kern="1200" dirty="0">
+              <a:rPr lang="en-US" sz="1400" kern="1200" dirty="0">
                 <a:solidFill>
                   <a:schemeClr val="tx1"/>
                 </a:solidFill>
@@ -1849,7 +1849,7 @@
           </a:p>
           <a:p>
             <a:r>
-              <a:rPr lang="en-US" sz="1200" b="1" kern="1200" dirty="0">
+              <a:rPr lang="en-US" sz="1400" b="1" kern="1200" dirty="0">
                 <a:solidFill>
                   <a:schemeClr val="tx1"/>
                 </a:solidFill>
@@ -1860,7 +1860,7 @@
               </a:rPr>
               <a:t>Review our “court-room” scenario…   The 3 men in the dock; the Judge; the Jury…   What type of glasses are we all wearing?</a:t>
             </a:r>
-            <a:endParaRPr lang="en-US" sz="1200" kern="1200" dirty="0">
+            <a:endParaRPr lang="en-US" sz="1400" kern="1200" dirty="0">
               <a:solidFill>
                 <a:schemeClr val="tx1"/>
               </a:solidFill>
@@ -1872,7 +1872,7 @@
           </a:p>
           <a:p>
             <a:r>
-              <a:rPr lang="en-US" sz="1200" b="1" kern="1200" dirty="0">
+              <a:rPr lang="en-US" sz="1400" b="1" kern="1200" dirty="0">
                 <a:solidFill>
                   <a:schemeClr val="tx1"/>
                 </a:solidFill>
@@ -1883,7 +1883,7 @@
               </a:rPr>
               <a:t>Is pagan mankind guilty?</a:t>
             </a:r>
-            <a:endParaRPr lang="en-US" sz="1200" kern="1200" dirty="0">
+            <a:endParaRPr lang="en-US" sz="1400" kern="1200" dirty="0">
               <a:solidFill>
                 <a:schemeClr val="tx1"/>
               </a:solidFill>
@@ -1896,7 +1896,7 @@
           <a:p>
             <a:pPr lvl="0"/>
             <a:r>
-              <a:rPr lang="en-US" sz="1200" b="1" kern="1200" dirty="0">
+              <a:rPr lang="en-US" sz="1400" b="1" kern="1200" dirty="0">
                 <a:solidFill>
                   <a:schemeClr val="tx1"/>
                 </a:solidFill>
@@ -1907,7 +1907,7 @@
               </a:rPr>
               <a:t>How do you know?   </a:t>
             </a:r>
-            <a:endParaRPr lang="en-US" sz="1200" kern="1200" dirty="0">
+            <a:endParaRPr lang="en-US" sz="1400" kern="1200" dirty="0">
               <a:solidFill>
                 <a:schemeClr val="tx1"/>
               </a:solidFill>
@@ -1920,7 +1920,7 @@
           <a:p>
             <a:pPr lvl="0"/>
             <a:r>
-              <a:rPr lang="en-US" sz="1200" b="1" kern="1200" dirty="0">
+              <a:rPr lang="en-US" sz="1400" b="1" kern="1200" dirty="0">
                 <a:solidFill>
                   <a:schemeClr val="tx1"/>
                 </a:solidFill>
@@ -1931,7 +1931,7 @@
               </a:rPr>
               <a:t>Do you now judge the Pagan man guilty?</a:t>
             </a:r>
-            <a:endParaRPr lang="en-US" sz="1200" kern="1200" dirty="0">
+            <a:endParaRPr lang="en-US" sz="1400" kern="1200" dirty="0">
               <a:solidFill>
                 <a:schemeClr val="tx1"/>
               </a:solidFill>
@@ -1944,7 +1944,7 @@
           <a:p>
             <a:pPr lvl="0"/>
             <a:r>
-              <a:rPr lang="en-US" sz="1200" b="1" kern="1200" dirty="0">
+              <a:rPr lang="en-US" sz="1400" b="1" kern="1200" dirty="0">
                 <a:solidFill>
                   <a:schemeClr val="tx1"/>
                 </a:solidFill>
@@ -1955,7 +1955,7 @@
               </a:rPr>
               <a:t>Read Romans 2:1-3 (PAUSE)</a:t>
             </a:r>
-            <a:endParaRPr lang="en-US" sz="1200" kern="1200" dirty="0">
+            <a:endParaRPr lang="en-US" sz="1400" kern="1200" dirty="0">
               <a:solidFill>
                 <a:schemeClr val="tx1"/>
               </a:solidFill>
@@ -1968,7 +1968,7 @@
           <a:p>
             <a:pPr lvl="0"/>
             <a:r>
-              <a:rPr lang="en-US" sz="1200" b="1" kern="1200" dirty="0">
+              <a:rPr lang="en-US" sz="1400" b="1" kern="1200" dirty="0">
                 <a:solidFill>
                   <a:schemeClr val="tx1"/>
                 </a:solidFill>
@@ -1979,7 +1979,7 @@
               </a:rPr>
               <a:t>What about Matthew 7:1-2  ???</a:t>
             </a:r>
-            <a:endParaRPr lang="en-US" sz="1200" kern="1200" dirty="0">
+            <a:endParaRPr lang="en-US" sz="1400" kern="1200" dirty="0">
               <a:solidFill>
                 <a:schemeClr val="tx1"/>
               </a:solidFill>
@@ -1992,7 +1992,7 @@
           <a:p>
             <a:pPr lvl="0"/>
             <a:r>
-              <a:rPr lang="en-US" sz="1200" b="1" kern="1200" dirty="0">
+              <a:rPr lang="en-US" sz="1400" b="1" kern="1200" dirty="0">
                 <a:solidFill>
                   <a:schemeClr val="tx1"/>
                 </a:solidFill>
@@ -2003,7 +2003,7 @@
               </a:rPr>
               <a:t>What about I Cor. 2:13-16   ???</a:t>
             </a:r>
-            <a:endParaRPr lang="en-US" sz="1200" kern="1200" dirty="0">
+            <a:endParaRPr lang="en-US" sz="1400" kern="1200" dirty="0">
               <a:solidFill>
                 <a:schemeClr val="tx1"/>
               </a:solidFill>
@@ -2016,7 +2016,7 @@
           <a:p>
             <a:pPr lvl="0"/>
             <a:r>
-              <a:rPr lang="en-US" sz="1200" b="1" kern="1200" dirty="0">
+              <a:rPr lang="en-US" sz="1400" b="1" kern="1200" dirty="0">
                 <a:solidFill>
                   <a:schemeClr val="tx1"/>
                 </a:solidFill>
@@ -2027,7 +2027,7 @@
               </a:rPr>
               <a:t>What is the common thread?   A common measuring stick that we all possess and recognize?</a:t>
             </a:r>
-            <a:endParaRPr lang="en-US" sz="1200" kern="1200" dirty="0">
+            <a:endParaRPr lang="en-US" sz="1400" kern="1200" dirty="0">
               <a:solidFill>
                 <a:schemeClr val="tx1"/>
               </a:solidFill>
@@ -2040,7 +2040,7 @@
           <a:p>
             <a:pPr lvl="0"/>
             <a:r>
-              <a:rPr lang="en-US" sz="1200" b="1" kern="1200" dirty="0">
+              <a:rPr lang="en-US" sz="1400" b="1" kern="1200" dirty="0">
                 <a:solidFill>
                   <a:schemeClr val="tx1"/>
                 </a:solidFill>
@@ -2051,7 +2051,7 @@
               </a:rPr>
               <a:t>Aren’t we (i.e. the jurist) now also defendants?</a:t>
             </a:r>
-            <a:endParaRPr lang="en-US" sz="1200" kern="1200" dirty="0">
+            <a:endParaRPr lang="en-US" sz="1400" kern="1200" dirty="0">
               <a:solidFill>
                 <a:schemeClr val="tx1"/>
               </a:solidFill>
@@ -2063,7 +2063,7 @@
           </a:p>
           <a:p>
             <a:r>
-              <a:rPr lang="en-US" sz="1200" kern="1200" dirty="0">
+              <a:rPr lang="en-US" sz="1400" kern="1200" dirty="0">
                 <a:solidFill>
                   <a:schemeClr val="tx1"/>
                 </a:solidFill>
@@ -2077,7 +2077,7 @@
           </a:p>
           <a:p>
             <a:r>
-              <a:rPr lang="en-US" sz="1200" b="1" kern="1200" dirty="0">
+              <a:rPr lang="en-US" sz="1400" b="1" kern="1200" dirty="0">
                 <a:solidFill>
                   <a:schemeClr val="tx1"/>
                 </a:solidFill>
@@ -2088,7 +2088,7 @@
               </a:rPr>
               <a:t>Read I Corinthians 2:13-16</a:t>
             </a:r>
-            <a:endParaRPr lang="en-US" sz="1200" kern="1200" dirty="0">
+            <a:endParaRPr lang="en-US" sz="1400" kern="1200" dirty="0">
               <a:solidFill>
                 <a:schemeClr val="tx1"/>
               </a:solidFill>
@@ -2101,7 +2101,7 @@
           <a:p>
             <a:pPr lvl="0"/>
             <a:r>
-              <a:rPr lang="en-US" sz="1200" b="1" kern="1200" dirty="0">
+              <a:rPr lang="en-US" sz="1400" b="1" kern="1200" dirty="0">
                 <a:solidFill>
                   <a:schemeClr val="tx1"/>
                 </a:solidFill>
@@ -2112,7 +2112,7 @@
               </a:rPr>
               <a:t>How can we “know” anything?   (“But we have the mind of Christ.”)   How is this possible?   John 18:37</a:t>
             </a:r>
-            <a:endParaRPr lang="en-US" sz="1200" kern="1200" dirty="0">
+            <a:endParaRPr lang="en-US" sz="1400" kern="1200" dirty="0">
               <a:solidFill>
                 <a:schemeClr val="tx1"/>
               </a:solidFill>
@@ -2125,7 +2125,7 @@
           <a:p>
             <a:pPr lvl="0"/>
             <a:r>
-              <a:rPr lang="en-US" sz="1200" b="1" kern="1200" dirty="0">
+              <a:rPr lang="en-US" sz="1400" b="1" kern="1200" dirty="0">
                 <a:solidFill>
                   <a:schemeClr val="tx1"/>
                 </a:solidFill>
@@ -2136,7 +2136,7 @@
               </a:rPr>
               <a:t>What is meant by v15?   What is meant by “rightly judged”?</a:t>
             </a:r>
-            <a:endParaRPr lang="en-US" sz="1200" kern="1200" dirty="0">
+            <a:endParaRPr lang="en-US" sz="1400" kern="1200" dirty="0">
               <a:solidFill>
                 <a:schemeClr val="tx1"/>
               </a:solidFill>
@@ -2149,7 +2149,7 @@
           <a:p>
             <a:pPr lvl="0"/>
             <a:r>
-              <a:rPr lang="en-US" sz="1200" b="1" kern="1200" dirty="0">
+              <a:rPr lang="en-US" sz="1400" b="1" kern="1200" dirty="0">
                 <a:solidFill>
                   <a:schemeClr val="tx1"/>
                 </a:solidFill>
@@ -2160,7 +2160,7 @@
               </a:rPr>
               <a:t>Is this passage a clue as to the meaning of Jesus’ statement, “Everyone who is of the Truth hears My voice.” …?</a:t>
             </a:r>
-            <a:endParaRPr lang="en-US" sz="1200" kern="1200" dirty="0">
+            <a:endParaRPr lang="en-US" sz="1400" kern="1200" dirty="0">
               <a:solidFill>
                 <a:schemeClr val="tx1"/>
               </a:solidFill>
@@ -2173,7 +2173,7 @@
           <a:p>
             <a:pPr lvl="0"/>
             <a:r>
-              <a:rPr lang="en-US" sz="1200" b="1" kern="1200" dirty="0">
+              <a:rPr lang="en-US" sz="1400" b="1" kern="1200" dirty="0">
                 <a:solidFill>
                   <a:schemeClr val="tx1"/>
                 </a:solidFill>
@@ -2184,7 +2184,7 @@
               </a:rPr>
               <a:t>Is this a clue as to the power of the glasses we are given to wear as jurors within the Romans 1-3 court-room?</a:t>
             </a:r>
-            <a:endParaRPr lang="en-US" sz="1200" kern="1200" dirty="0">
+            <a:endParaRPr lang="en-US" sz="1400" kern="1200" dirty="0">
               <a:solidFill>
                 <a:schemeClr val="tx1"/>
               </a:solidFill>
@@ -2197,7 +2197,7 @@
           <a:p>
             <a:pPr lvl="0"/>
             <a:r>
-              <a:rPr lang="en-US" sz="1200" b="1" kern="1200" dirty="0">
+              <a:rPr lang="en-US" sz="1400" b="1" kern="1200" dirty="0">
                 <a:solidFill>
                   <a:schemeClr val="tx1"/>
                 </a:solidFill>
@@ -2209,7 +2209,7 @@
               <a:t>What is the correlation within I </a:t>
             </a:r>
             <a:r>
-              <a:rPr lang="en-US" sz="1200" b="1" kern="1200" dirty="0" err="1">
+              <a:rPr lang="en-US" sz="1400" b="1" kern="1200" dirty="0" err="1">
                 <a:solidFill>
                   <a:schemeClr val="tx1"/>
                 </a:solidFill>
@@ -2221,7 +2221,7 @@
               <a:t>Cor</a:t>
             </a:r>
             <a:r>
-              <a:rPr lang="en-US" sz="1200" b="1" kern="1200" dirty="0">
+              <a:rPr lang="en-US" sz="1400" b="1" kern="1200" dirty="0">
                 <a:solidFill>
                   <a:schemeClr val="tx1"/>
                 </a:solidFill>
@@ -2232,7 +2232,7 @@
               </a:rPr>
               <a:t> 3:9-15 …?</a:t>
             </a:r>
-            <a:endParaRPr lang="en-US" sz="1200" kern="1200" dirty="0">
+            <a:endParaRPr lang="en-US" sz="1400" kern="1200" dirty="0">
               <a:solidFill>
                 <a:schemeClr val="tx1"/>
               </a:solidFill>
@@ -2244,7 +2244,7 @@
           </a:p>
           <a:p>
             <a:r>
-              <a:rPr lang="en-US" sz="1200" b="1" kern="1200" dirty="0">
+              <a:rPr lang="en-US" sz="1400" b="1" kern="1200" dirty="0">
                 <a:solidFill>
                   <a:schemeClr val="tx1"/>
                 </a:solidFill>
@@ -2255,7 +2255,7 @@
               </a:rPr>
               <a:t>Review how the court-room changes as we enter chapter 2.</a:t>
             </a:r>
-            <a:endParaRPr lang="en-US" sz="1200" kern="1200" dirty="0">
+            <a:endParaRPr lang="en-US" sz="1400" kern="1200" dirty="0">
               <a:solidFill>
                 <a:schemeClr val="tx1"/>
               </a:solidFill>
@@ -2267,7 +2267,7 @@
           </a:p>
           <a:p>
             <a:r>
-              <a:rPr lang="en-US" sz="1200" b="1" kern="1200" dirty="0">
+              <a:rPr lang="en-US" sz="1400" b="1" kern="1200" dirty="0">
                 <a:solidFill>
                   <a:schemeClr val="tx1"/>
                 </a:solidFill>
@@ -2278,7 +2278,7 @@
               </a:rPr>
               <a:t>Let us not confuse Romans 2 with Revelation 20…  at Judgment Day (Rev 20), there will be no reasoning or preaching; only condemnation; based upon the Principles of God’s Judgment.</a:t>
             </a:r>
-            <a:endParaRPr lang="en-US" sz="1200" kern="1200" dirty="0">
+            <a:endParaRPr lang="en-US" sz="1400" kern="1200" dirty="0">
               <a:solidFill>
                 <a:schemeClr val="tx1"/>
               </a:solidFill>
@@ -2290,7 +2290,7 @@
           </a:p>
           <a:p>
             <a:r>
-              <a:rPr lang="en-US" sz="1200" b="1" kern="1200" dirty="0">
+              <a:rPr lang="en-US" sz="1400" b="1" kern="1200" dirty="0">
                 <a:solidFill>
                   <a:schemeClr val="tx1"/>
                 </a:solidFill>
@@ -2301,7 +2301,7 @@
               </a:rPr>
               <a:t>The Agent of divine judgment is Jesus Christ.   John 5:22, 27;    Acts 17:29-31</a:t>
             </a:r>
-            <a:endParaRPr lang="en-US" sz="1200" kern="1200" dirty="0">
+            <a:endParaRPr lang="en-US" sz="1400" kern="1200" dirty="0">
               <a:solidFill>
                 <a:schemeClr val="tx1"/>
               </a:solidFill>
@@ -2313,7 +2313,7 @@
           </a:p>
           <a:p>
             <a:r>
-              <a:rPr lang="en-US" sz="1200" b="1" kern="1200" dirty="0">
+              <a:rPr lang="en-US" sz="1400" b="1" kern="1200" dirty="0">
                 <a:solidFill>
                   <a:schemeClr val="tx1"/>
                 </a:solidFill>
@@ -2324,7 +2324,7 @@
               </a:rPr>
               <a:t>Now that Jesus is the divine judge within our court-room…</a:t>
             </a:r>
-            <a:endParaRPr lang="en-US" sz="1200" kern="1200" dirty="0">
+            <a:endParaRPr lang="en-US" sz="1400" kern="1200" dirty="0">
               <a:solidFill>
                 <a:schemeClr val="tx1"/>
               </a:solidFill>
@@ -2337,7 +2337,7 @@
           <a:p>
             <a:pPr lvl="0"/>
             <a:r>
-              <a:rPr lang="en-US" sz="1200" b="1" kern="1200" dirty="0">
+              <a:rPr lang="en-US" sz="1400" b="1" kern="1200" dirty="0">
                 <a:solidFill>
                   <a:schemeClr val="tx1"/>
                 </a:solidFill>
@@ -2348,7 +2348,7 @@
               </a:rPr>
               <a:t>What does this say about God’s “fairness”?</a:t>
             </a:r>
-            <a:endParaRPr lang="en-US" sz="1200" kern="1200" dirty="0">
+            <a:endParaRPr lang="en-US" sz="1400" kern="1200" dirty="0">
               <a:solidFill>
                 <a:schemeClr val="tx1"/>
               </a:solidFill>
@@ -2467,7 +2467,7 @@
               <a:buNone/>
             </a:pPr>
             <a:r>
-              <a:rPr lang="en-US" b="1" baseline="0" dirty="0"/>
+              <a:rPr lang="en-US" sz="1400" b="1" baseline="0" dirty="0"/>
               <a:t>What is the greatest thought that ever entered the mind of Man?</a:t>
             </a:r>
           </a:p>
@@ -2476,7 +2476,7 @@
               <a:buFont typeface="Arial" pitchFamily="34" charset="0"/>
               <a:buNone/>
             </a:pPr>
-            <a:endParaRPr lang="en-US" baseline="0" dirty="0"/>
+            <a:endParaRPr lang="en-US" sz="1400" baseline="0" dirty="0"/>
           </a:p>
           <a:p>
             <a:pPr marL="0" marR="0" indent="0" algn="l" defTabSz="914400" rtl="0" eaLnBrk="0" fontAlgn="base" latinLnBrk="0" hangingPunct="0">
@@ -2497,7 +2497,7 @@
               <a:defRPr/>
             </a:pPr>
             <a:r>
-              <a:rPr lang="en-US" b="1" baseline="0" dirty="0"/>
+              <a:rPr lang="en-US" sz="1400" b="1" baseline="0" dirty="0"/>
               <a:t>	“My responsibility to my Maker!”   Daniel Webster</a:t>
             </a:r>
           </a:p>
@@ -2519,7 +2519,7 @@
               <a:tabLst/>
               <a:defRPr/>
             </a:pPr>
-            <a:endParaRPr lang="en-US" b="1" baseline="0" dirty="0"/>
+            <a:endParaRPr lang="en-US" sz="1400" b="1" baseline="0" dirty="0"/>
           </a:p>
           <a:p>
             <a:pPr marL="0" marR="0" indent="0" algn="l" defTabSz="914400" rtl="0" eaLnBrk="0" fontAlgn="base" latinLnBrk="0" hangingPunct="0">
@@ -2540,7 +2540,7 @@
               <a:defRPr/>
             </a:pPr>
             <a:r>
-              <a:rPr lang="en-US" b="1" baseline="0" dirty="0"/>
+              <a:rPr lang="en-US" sz="1400" b="1" baseline="0" dirty="0"/>
               <a:t>How does God deal with Man individually?   Ezekiel 18…?     Mankind Corporately?   </a:t>
             </a:r>
           </a:p>
@@ -2562,7 +2562,7 @@
               <a:tabLst/>
               <a:defRPr/>
             </a:pPr>
-            <a:endParaRPr lang="en-US" b="1" baseline="0" dirty="0"/>
+            <a:endParaRPr lang="en-US" sz="1400" b="1" baseline="0" dirty="0"/>
           </a:p>
           <a:p>
             <a:pPr marL="0" marR="0" indent="0" algn="l" defTabSz="914400" rtl="0" eaLnBrk="0" fontAlgn="base" latinLnBrk="0" hangingPunct="0">
@@ -2583,7 +2583,7 @@
               <a:defRPr/>
             </a:pPr>
             <a:r>
-              <a:rPr lang="en-US" b="1" baseline="0" dirty="0"/>
+              <a:rPr lang="en-US" sz="1400" b="1" baseline="0" dirty="0"/>
               <a:t>According to Truth…</a:t>
             </a:r>
           </a:p>
@@ -2606,15 +2606,15 @@
               <a:defRPr/>
             </a:pPr>
             <a:r>
-              <a:rPr lang="en-US" b="1" baseline="0" dirty="0"/>
+              <a:rPr lang="en-US" sz="1400" b="1" baseline="0" dirty="0"/>
               <a:t>In this court-room, we are privileged to be wear (as jurists) the glasses of God’s Truth… to see the evidence with the Mind of Christ (1 </a:t>
             </a:r>
             <a:r>
-              <a:rPr lang="en-US" b="1" baseline="0" dirty="0" err="1"/>
+              <a:rPr lang="en-US" sz="1400" b="1" baseline="0" dirty="0" err="1"/>
               <a:t>Cor</a:t>
             </a:r>
             <a:r>
-              <a:rPr lang="en-US" b="1" baseline="0" dirty="0"/>
+              <a:rPr lang="en-US" sz="1400" b="1" baseline="0" dirty="0"/>
               <a:t> 2:15).  </a:t>
             </a:r>
           </a:p>
@@ -2637,7 +2637,7 @@
               <a:defRPr/>
             </a:pPr>
             <a:r>
-              <a:rPr lang="en-US" b="1" baseline="0" dirty="0"/>
+              <a:rPr lang="en-US" sz="1400" b="1" baseline="0" dirty="0"/>
               <a:t>Emphatically!   We MUST always wear these when doing Kingdom work (in humility, planting, watering, answering, with compassion).</a:t>
             </a:r>
           </a:p>
@@ -2646,14 +2646,14 @@
               <a:buFont typeface="Arial" pitchFamily="34" charset="0"/>
               <a:buNone/>
             </a:pPr>
-            <a:endParaRPr lang="en-US" baseline="0" dirty="0"/>
+            <a:endParaRPr lang="en-US" sz="1400" baseline="0" dirty="0"/>
           </a:p>
           <a:p>
             <a:pPr marL="0" lvl="0" indent="0">
               <a:buFont typeface="Arial" pitchFamily="34" charset="0"/>
               <a:buNone/>
             </a:pPr>
-            <a:endParaRPr lang="en-US" b="0" baseline="0" dirty="0"/>
+            <a:endParaRPr lang="en-US" sz="1400" b="0" baseline="0" dirty="0"/>
           </a:p>
           <a:p>
             <a:pPr marL="0" lvl="0" indent="0">
@@ -2661,7 +2661,7 @@
               <a:buNone/>
             </a:pPr>
             <a:r>
-              <a:rPr lang="en-US" b="1" baseline="0" dirty="0"/>
+              <a:rPr lang="en-US" sz="1400" b="1" baseline="0" dirty="0"/>
               <a:t>Seven principles dealing with how God will decide and respond to mankind.</a:t>
             </a:r>
           </a:p>
@@ -2670,7 +2670,7 @@
               <a:buFont typeface="Arial" pitchFamily="34" charset="0"/>
               <a:buNone/>
             </a:pPr>
-            <a:endParaRPr lang="en-US" baseline="0" dirty="0"/>
+            <a:endParaRPr lang="en-US" sz="1400" baseline="0" dirty="0"/>
           </a:p>
           <a:p>
             <a:pPr marL="228600" indent="-228600">
@@ -2678,7 +2678,7 @@
               <a:buAutoNum type="arabicParenBoth"/>
             </a:pPr>
             <a:r>
-              <a:rPr lang="en-US" baseline="0" dirty="0"/>
+              <a:rPr lang="en-US" sz="1400" baseline="0" dirty="0"/>
               <a:t>According to Truth</a:t>
             </a:r>
           </a:p>
@@ -2688,7 +2688,7 @@
               <a:buChar char="•"/>
             </a:pPr>
             <a:r>
-              <a:rPr lang="en-US" baseline="0" dirty="0"/>
+              <a:rPr lang="en-US" sz="1400" baseline="0" dirty="0"/>
               <a:t>Do you think that you will escape judgment – You?   Self righteousness is a death sentence that we all share in.  (Ezekiel 16:48-50)</a:t>
             </a:r>
           </a:p>
@@ -2698,7 +2698,7 @@
               <a:buChar char="•"/>
             </a:pPr>
             <a:r>
-              <a:rPr lang="en-US" baseline="0" dirty="0"/>
+              <a:rPr lang="en-US" sz="1400" baseline="0" dirty="0"/>
               <a:t>The principle that keeps us in ignorance is condemnation (coming to a conclusion) before investigation.</a:t>
             </a:r>
           </a:p>
@@ -2708,7 +2708,7 @@
               <a:buChar char="•"/>
             </a:pPr>
             <a:r>
-              <a:rPr lang="en-US" baseline="0" dirty="0"/>
+              <a:rPr lang="en-US" sz="1400" baseline="0" dirty="0"/>
               <a:t>v4, Not only do we feel ourselves innocent, but the riches of God should be leading us to repentance.   </a:t>
             </a:r>
           </a:p>
@@ -2718,7 +2718,7 @@
               <a:buChar char="•"/>
             </a:pPr>
             <a:r>
-              <a:rPr lang="en-US" baseline="0" dirty="0"/>
+              <a:rPr lang="en-US" sz="1400" baseline="0" dirty="0"/>
               <a:t>Note God’s progressive degrees – goodness, forbearance, and longsuffering – in responding to our ingratitude.</a:t>
             </a:r>
           </a:p>
@@ -2727,7 +2727,7 @@
               <a:buFont typeface="Arial" pitchFamily="34" charset="0"/>
               <a:buNone/>
             </a:pPr>
-            <a:endParaRPr lang="en-US" baseline="0" dirty="0"/>
+            <a:endParaRPr lang="en-US" sz="1400" baseline="0" dirty="0"/>
           </a:p>
           <a:p>
             <a:pPr marL="0" indent="0">
@@ -2735,7 +2735,7 @@
               <a:buNone/>
             </a:pPr>
             <a:r>
-              <a:rPr lang="en-US" baseline="0" dirty="0"/>
+              <a:rPr lang="en-US" sz="1400" baseline="0" dirty="0"/>
               <a:t>(2)  According to Accumulated Guilt</a:t>
             </a:r>
           </a:p>
@@ -2745,7 +2745,7 @@
               <a:buChar char="•"/>
             </a:pPr>
             <a:r>
-              <a:rPr lang="en-US" baseline="0" dirty="0"/>
+              <a:rPr lang="en-US" sz="1400" baseline="0" dirty="0"/>
               <a:t>The First Law of Holes…  stop digging.</a:t>
             </a:r>
           </a:p>
@@ -2755,7 +2755,7 @@
               <a:buChar char="•"/>
             </a:pPr>
             <a:r>
-              <a:rPr lang="en-US" baseline="0" dirty="0"/>
+              <a:rPr lang="en-US" sz="1400" baseline="0" dirty="0"/>
               <a:t>Ezekiel 16:49-50 – Example Sodom and Gomorrah – pride; more than homosexuality</a:t>
             </a:r>
           </a:p>
@@ -2765,7 +2765,7 @@
               <a:buChar char="•"/>
             </a:pPr>
             <a:r>
-              <a:rPr lang="en-US" baseline="0" dirty="0"/>
+              <a:rPr lang="en-US" sz="1400" baseline="0" dirty="0"/>
               <a:t>Luke 17:28-30</a:t>
             </a:r>
           </a:p>
@@ -2788,7 +2788,7 @@
               <a:defRPr/>
             </a:pPr>
             <a:r>
-              <a:rPr lang="en-US" baseline="0" dirty="0"/>
+              <a:rPr lang="en-US" sz="1400" baseline="0" dirty="0"/>
               <a:t>Prosperity always feeds pride; it’s easy to be humble when you are poor.</a:t>
             </a:r>
           </a:p>
@@ -2797,28 +2797,28 @@
               <a:buFont typeface="Arial" pitchFamily="34" charset="0"/>
               <a:buNone/>
             </a:pPr>
-            <a:endParaRPr lang="en-US" baseline="0" dirty="0"/>
+            <a:endParaRPr lang="en-US" sz="1400" baseline="0" dirty="0"/>
           </a:p>
           <a:p>
             <a:pPr marL="0" indent="0">
               <a:buFont typeface="Arial" pitchFamily="34" charset="0"/>
               <a:buNone/>
             </a:pPr>
-            <a:endParaRPr lang="en-US" baseline="0" dirty="0"/>
+            <a:endParaRPr lang="en-US" sz="1400" baseline="0" dirty="0"/>
           </a:p>
           <a:p>
             <a:pPr marL="171450" indent="-171450">
               <a:buFont typeface="Arial" pitchFamily="34" charset="0"/>
               <a:buChar char="•"/>
             </a:pPr>
-            <a:endParaRPr lang="en-US" baseline="0" dirty="0"/>
+            <a:endParaRPr lang="en-US" sz="1400" baseline="0" dirty="0"/>
           </a:p>
           <a:p>
             <a:pPr marL="0" indent="0">
               <a:buFont typeface="Arial" pitchFamily="34" charset="0"/>
               <a:buNone/>
             </a:pPr>
-            <a:endParaRPr lang="en-US" baseline="0" dirty="0"/>
+            <a:endParaRPr lang="en-US" sz="1400" baseline="0" dirty="0"/>
           </a:p>
           <a:p>
             <a:pPr marL="0" indent="0">
@@ -6906,7 +6906,7 @@
 </file>
 
 <file path=ppt/slides/slide11.xml><?xml version="1.0" encoding="utf-8"?>
-<p:sld xmlns:a="http://schemas.openxmlformats.org/drawingml/2006/main" xmlns:r="http://schemas.openxmlformats.org/officeDocument/2006/relationships" xmlns:p="http://schemas.openxmlformats.org/presentationml/2006/main">
+<p:sld xmlns:a="http://schemas.openxmlformats.org/drawingml/2006/main" xmlns:r="http://schemas.openxmlformats.org/officeDocument/2006/relationships" xmlns:p="http://schemas.openxmlformats.org/presentationml/2006/main" show="0">
   <p:cSld>
     <p:spTree>
       <p:nvGrpSpPr>
@@ -13474,7 +13474,7 @@
 </file>
 
 <file path=ppt/slides/slide9.xml><?xml version="1.0" encoding="utf-8"?>
-<p:sld xmlns:a="http://schemas.openxmlformats.org/drawingml/2006/main" xmlns:r="http://schemas.openxmlformats.org/officeDocument/2006/relationships" xmlns:p="http://schemas.openxmlformats.org/presentationml/2006/main">
+<p:sld xmlns:a="http://schemas.openxmlformats.org/drawingml/2006/main" xmlns:r="http://schemas.openxmlformats.org/officeDocument/2006/relationships" xmlns:p="http://schemas.openxmlformats.org/presentationml/2006/main" show="0">
   <p:cSld>
     <p:spTree>
       <p:nvGrpSpPr>
